--- a/Menchville_EOC_Reading_Slide1.pptx
+++ b/Menchville_EOC_Reading_Slide1.pptx
@@ -1194,7 +1194,7 @@
                   <a:srgbClr val="10B981"/>
                 </a:solidFill>
               </a:rPr>
-              <a:t>45% → 61% (+16 pts)</a:t>
+              <a:t>42% → 58% (+16 pts)</a:t>
             </a:r>
             <a:endParaRPr lang="en-US" sz="1300" dirty="0"/>
           </a:p>
@@ -1302,7 +1302,7 @@
                   <a:srgbClr val="10B981"/>
                 </a:solidFill>
               </a:rPr>
-              <a:t>53% → 66% (+13 pts)</a:t>
+              <a:t>60% → 72% (+13 pts)</a:t>
             </a:r>
             <a:endParaRPr lang="en-US" sz="1300" dirty="0"/>
           </a:p>
@@ -1410,7 +1410,7 @@
                   <a:srgbClr val="10B981"/>
                 </a:solidFill>
               </a:rPr>
-              <a:t>50% → 62% (+12 pts)</a:t>
+              <a:t>52% → 64% (+12 pts)</a:t>
             </a:r>
             <a:endParaRPr lang="en-US" sz="1300" dirty="0"/>
           </a:p>

--- a/Menchville_EOC_Reading_Slide1.pptx
+++ b/Menchville_EOC_Reading_Slide1.pptx
@@ -1529,14 +1529,14 @@
               <a:buNone/>
             </a:pPr>
             <a:r>
-              <a:rPr lang="en-US" sz="3200" b="1" dirty="0">
+              <a:rPr lang="en-US" sz="2600" b="1" dirty="0">
                 <a:solidFill>
                   <a:srgbClr val="1E2761"/>
                 </a:solidFill>
               </a:rPr>
-              <a:t>Priority Gaps: Spring 2026 Performance (Menchville HS)</a:t>
-            </a:r>
-            <a:endParaRPr lang="en-US" sz="3200" dirty="0"/>
+              <a:t>Priority Gaps: Spring 2026 (Menchville HS)</a:t>
+            </a:r>
+            <a:endParaRPr lang="en-US" sz="2600" dirty="0"/>
           </a:p>
         </p:txBody>
       </p:sp>
@@ -1648,7 +1648,7 @@
         <p:spPr>
           <a:xfrm>
             <a:off x="502920" y="1508760"/>
-            <a:ext cx="5029200" cy="320040"/>
+            <a:ext cx="4297680" cy="320040"/>
           </a:xfrm>
           <a:prstGeom prst="rect">
             <a:avLst/>
@@ -1683,8 +1683,8 @@
         </p:nvSpPr>
         <p:spPr>
           <a:xfrm>
-            <a:off x="5943600" y="1417320"/>
-            <a:ext cx="2560320" cy="457200"/>
+            <a:off x="4983480" y="1417320"/>
+            <a:ext cx="3566160" cy="457200"/>
           </a:xfrm>
           <a:prstGeom prst="rect">
             <a:avLst/>
@@ -1700,14 +1700,14 @@
               <a:buNone/>
             </a:pPr>
             <a:r>
-              <a:rPr lang="en-US" sz="1200" b="1" dirty="0">
+              <a:rPr lang="en-US" sz="1100" b="1" dirty="0">
                 <a:solidFill>
                   <a:srgbClr val="1E2761"/>
                 </a:solidFill>
               </a:rPr>
-              <a:t>All: 52%  |  SWD: 41%  |  ELL: 32%</a:t>
-            </a:r>
-            <a:endParaRPr lang="en-US" sz="1200" dirty="0"/>
+              <a:t>All: 52%  |  SWD: 41%  |  MLL: 32% (8/25)</a:t>
+            </a:r>
+            <a:endParaRPr lang="en-US" sz="1100" dirty="0"/>
           </a:p>
         </p:txBody>
       </p:sp>
@@ -1783,7 +1783,7 @@
         <p:spPr>
           <a:xfrm>
             <a:off x="502920" y="2560320"/>
-            <a:ext cx="5029200" cy="320040"/>
+            <a:ext cx="4297680" cy="320040"/>
           </a:xfrm>
           <a:prstGeom prst="rect">
             <a:avLst/>
@@ -1818,8 +1818,8 @@
         </p:nvSpPr>
         <p:spPr>
           <a:xfrm>
-            <a:off x="5943600" y="2468880"/>
-            <a:ext cx="2560320" cy="457200"/>
+            <a:off x="4983480" y="2468880"/>
+            <a:ext cx="3566160" cy="457200"/>
           </a:xfrm>
           <a:prstGeom prst="rect">
             <a:avLst/>
@@ -1835,14 +1835,14 @@
               <a:buNone/>
             </a:pPr>
             <a:r>
-              <a:rPr lang="en-US" sz="1200" b="1" dirty="0">
+              <a:rPr lang="en-US" sz="1100" b="1" dirty="0">
                 <a:solidFill>
                   <a:srgbClr val="1E2761"/>
                 </a:solidFill>
               </a:rPr>
-              <a:t>All: 36%  |  SWD: 20%  |  ELL: 100%</a:t>
-            </a:r>
-            <a:endParaRPr lang="en-US" sz="1200" dirty="0"/>
+              <a:t>All: 36%  |  SWD: 20%  |  MLL: 100% (5/5)</a:t>
+            </a:r>
+            <a:endParaRPr lang="en-US" sz="1100" dirty="0"/>
           </a:p>
         </p:txBody>
       </p:sp>
@@ -1918,7 +1918,7 @@
         <p:spPr>
           <a:xfrm>
             <a:off x="502920" y="3611880"/>
-            <a:ext cx="5029200" cy="320040"/>
+            <a:ext cx="4297680" cy="320040"/>
           </a:xfrm>
           <a:prstGeom prst="rect">
             <a:avLst/>
@@ -1953,8 +1953,8 @@
         </p:nvSpPr>
         <p:spPr>
           <a:xfrm>
-            <a:off x="5943600" y="3520440"/>
-            <a:ext cx="2560320" cy="457200"/>
+            <a:off x="4983480" y="3520440"/>
+            <a:ext cx="3566160" cy="457200"/>
           </a:xfrm>
           <a:prstGeom prst="rect">
             <a:avLst/>
@@ -1970,14 +1970,14 @@
               <a:buNone/>
             </a:pPr>
             <a:r>
-              <a:rPr lang="en-US" sz="1200" b="1" dirty="0">
+              <a:rPr lang="en-US" sz="1100" b="1" dirty="0">
                 <a:solidFill>
                   <a:srgbClr val="1E2761"/>
                 </a:solidFill>
               </a:rPr>
-              <a:t>All: 58%  |  SWD: 41%  |  ELL: 20%</a:t>
-            </a:r>
-            <a:endParaRPr lang="en-US" sz="1200" dirty="0"/>
+              <a:t>All: 58%  |  SWD: 41%  |  MLL: 20% (2/10)</a:t>
+            </a:r>
+            <a:endParaRPr lang="en-US" sz="1100" dirty="0"/>
           </a:p>
         </p:txBody>
       </p:sp>
@@ -2011,7 +2011,7 @@
                   <a:srgbClr val="1F2A44"/>
                 </a:solidFill>
               </a:rPr>
-              <a:t>Goal: 60% proficiency across all populations  |  All Students Overall: 63%  |  SWD Overall: 47%  |  ELL Overall: 44%</a:t>
+              <a:t>Goal: 60% proficiency  |  All Students: 62%  |  SWD: 49%  |  MLL: 44% (reflects five MLL students; shown as % with correct/total)</a:t>
             </a:r>
             <a:endParaRPr lang="en-US" sz="1000" dirty="0"/>
           </a:p>
